--- a/dapr3_lectures/block2_fa/img_sandbox/qri_example.pptx
+++ b/dapr3_lectures/block2_fa/img_sandbox/qri_example.pptx
@@ -107,6 +107,11 @@
       </a:defRPr>
     </a:lvl9pPr>
   </p:defaultTextStyle>
+  <p:extLst>
+    <p:ext uri="{EFAFB233-063F-42B5-8137-9DF3F51BA10A}">
+      <p15:sldGuideLst xmlns:p15="http://schemas.microsoft.com/office/powerpoint/2012/main"/>
+    </p:ext>
+  </p:extLst>
 </p:presentation>
 </file>
 
@@ -241,7 +246,7 @@
           <a:p>
             <a:fld id="{FF54E6F2-0EBE-4A88-9E07-2C0D98FA4215}" type="datetimeFigureOut">
               <a:rPr lang="en-GB" smtClean="0"/>
-              <a:t>04/11/2025</a:t>
+              <a:t>26/08/2026</a:t>
             </a:fld>
             <a:endParaRPr lang="en-GB"/>
           </a:p>
@@ -411,7 +416,7 @@
           <a:p>
             <a:fld id="{FF54E6F2-0EBE-4A88-9E07-2C0D98FA4215}" type="datetimeFigureOut">
               <a:rPr lang="en-GB" smtClean="0"/>
-              <a:t>04/11/2025</a:t>
+              <a:t>26/08/2026</a:t>
             </a:fld>
             <a:endParaRPr lang="en-GB"/>
           </a:p>
@@ -591,7 +596,7 @@
           <a:p>
             <a:fld id="{FF54E6F2-0EBE-4A88-9E07-2C0D98FA4215}" type="datetimeFigureOut">
               <a:rPr lang="en-GB" smtClean="0"/>
-              <a:t>04/11/2025</a:t>
+              <a:t>26/08/2026</a:t>
             </a:fld>
             <a:endParaRPr lang="en-GB"/>
           </a:p>
@@ -761,7 +766,7 @@
           <a:p>
             <a:fld id="{FF54E6F2-0EBE-4A88-9E07-2C0D98FA4215}" type="datetimeFigureOut">
               <a:rPr lang="en-GB" smtClean="0"/>
-              <a:t>04/11/2025</a:t>
+              <a:t>26/08/2026</a:t>
             </a:fld>
             <a:endParaRPr lang="en-GB"/>
           </a:p>
@@ -1005,7 +1010,7 @@
           <a:p>
             <a:fld id="{FF54E6F2-0EBE-4A88-9E07-2C0D98FA4215}" type="datetimeFigureOut">
               <a:rPr lang="en-GB" smtClean="0"/>
-              <a:t>04/11/2025</a:t>
+              <a:t>26/08/2026</a:t>
             </a:fld>
             <a:endParaRPr lang="en-GB"/>
           </a:p>
@@ -1237,7 +1242,7 @@
           <a:p>
             <a:fld id="{FF54E6F2-0EBE-4A88-9E07-2C0D98FA4215}" type="datetimeFigureOut">
               <a:rPr lang="en-GB" smtClean="0"/>
-              <a:t>04/11/2025</a:t>
+              <a:t>26/08/2026</a:t>
             </a:fld>
             <a:endParaRPr lang="en-GB"/>
           </a:p>
@@ -1604,7 +1609,7 @@
           <a:p>
             <a:fld id="{FF54E6F2-0EBE-4A88-9E07-2C0D98FA4215}" type="datetimeFigureOut">
               <a:rPr lang="en-GB" smtClean="0"/>
-              <a:t>04/11/2025</a:t>
+              <a:t>26/08/2026</a:t>
             </a:fld>
             <a:endParaRPr lang="en-GB"/>
           </a:p>
@@ -1722,7 +1727,7 @@
           <a:p>
             <a:fld id="{FF54E6F2-0EBE-4A88-9E07-2C0D98FA4215}" type="datetimeFigureOut">
               <a:rPr lang="en-GB" smtClean="0"/>
-              <a:t>04/11/2025</a:t>
+              <a:t>26/08/2026</a:t>
             </a:fld>
             <a:endParaRPr lang="en-GB"/>
           </a:p>
@@ -1817,7 +1822,7 @@
           <a:p>
             <a:fld id="{FF54E6F2-0EBE-4A88-9E07-2C0D98FA4215}" type="datetimeFigureOut">
               <a:rPr lang="en-GB" smtClean="0"/>
-              <a:t>04/11/2025</a:t>
+              <a:t>26/08/2026</a:t>
             </a:fld>
             <a:endParaRPr lang="en-GB"/>
           </a:p>
@@ -2094,7 +2099,7 @@
           <a:p>
             <a:fld id="{FF54E6F2-0EBE-4A88-9E07-2C0D98FA4215}" type="datetimeFigureOut">
               <a:rPr lang="en-GB" smtClean="0"/>
-              <a:t>04/11/2025</a:t>
+              <a:t>26/08/2026</a:t>
             </a:fld>
             <a:endParaRPr lang="en-GB"/>
           </a:p>
@@ -2351,7 +2356,7 @@
           <a:p>
             <a:fld id="{FF54E6F2-0EBE-4A88-9E07-2C0D98FA4215}" type="datetimeFigureOut">
               <a:rPr lang="en-GB" smtClean="0"/>
-              <a:t>04/11/2025</a:t>
+              <a:t>26/08/2026</a:t>
             </a:fld>
             <a:endParaRPr lang="en-GB"/>
           </a:p>
@@ -2564,7 +2569,7 @@
           <a:p>
             <a:fld id="{FF54E6F2-0EBE-4A88-9E07-2C0D98FA4215}" type="datetimeFigureOut">
               <a:rPr lang="en-GB" smtClean="0"/>
-              <a:t>04/11/2025</a:t>
+              <a:t>26/08/2026</a:t>
             </a:fld>
             <a:endParaRPr lang="en-GB"/>
           </a:p>
@@ -7253,13 +7258,13 @@
           <a:p>
             <a:r>
               <a:rPr lang="en-GB" sz="1600" dirty="0"/>
-              <a:t>0.6 </a:t>
+              <a:t>0.57 </a:t>
             </a:r>
           </a:p>
           <a:p>
             <a:r>
               <a:rPr lang="en-GB" sz="1600" dirty="0"/>
-              <a:t>    0.7</a:t>
+              <a:t>    0.64</a:t>
             </a:r>
           </a:p>
           <a:p>
@@ -7271,13 +7276,13 @@
           <a:p>
             <a:r>
               <a:rPr lang="en-GB" sz="1600" dirty="0"/>
-              <a:t>   0.74</a:t>
+              <a:t>   0.51</a:t>
             </a:r>
           </a:p>
           <a:p>
             <a:r>
               <a:rPr lang="en-GB" sz="1600" dirty="0"/>
-              <a:t>0.6</a:t>
+              <a:t>0.49</a:t>
             </a:r>
           </a:p>
         </p:txBody>
@@ -7312,13 +7317,13 @@
           <a:p>
             <a:r>
               <a:rPr lang="en-GB" sz="1600" dirty="0"/>
-              <a:t>0.86 </a:t>
+              <a:t>0.61 </a:t>
             </a:r>
           </a:p>
           <a:p>
             <a:r>
               <a:rPr lang="en-GB" sz="1600" dirty="0"/>
-              <a:t>      0.81</a:t>
+              <a:t>      0.70</a:t>
             </a:r>
           </a:p>
           <a:p>
@@ -7330,13 +7335,13 @@
           <a:p>
             <a:r>
               <a:rPr lang="en-GB" sz="1600" dirty="0"/>
-              <a:t>      0.61</a:t>
+              <a:t>      0.48</a:t>
             </a:r>
           </a:p>
           <a:p>
             <a:r>
               <a:rPr lang="en-GB" sz="1600" dirty="0"/>
-              <a:t>  0.8</a:t>
+              <a:t>  0.69</a:t>
             </a:r>
           </a:p>
         </p:txBody>
@@ -7371,13 +7376,13 @@
           <a:p>
             <a:r>
               <a:rPr lang="en-GB" sz="1600" dirty="0"/>
-              <a:t>0.62 </a:t>
+              <a:t>0.56 </a:t>
             </a:r>
           </a:p>
           <a:p>
             <a:r>
               <a:rPr lang="en-GB" sz="1600" dirty="0"/>
-              <a:t>      0.77</a:t>
+              <a:t>      0.63</a:t>
             </a:r>
           </a:p>
           <a:p>
@@ -7389,13 +7394,13 @@
           <a:p>
             <a:r>
               <a:rPr lang="en-GB" sz="1600" dirty="0"/>
-              <a:t>      0.62</a:t>
+              <a:t>      0.58</a:t>
             </a:r>
           </a:p>
           <a:p>
             <a:r>
               <a:rPr lang="en-GB" sz="1600" dirty="0"/>
-              <a:t>0.63</a:t>
+              <a:t>0.58</a:t>
             </a:r>
           </a:p>
         </p:txBody>
@@ -9649,183 +9654,6 @@
       </p:cxnSp>
       <p:sp>
         <p:nvSpPr>
-          <p:cNvPr id="2" name="TextBox 1">
-            <a:extLst>
-              <a:ext uri="{FF2B5EF4-FFF2-40B4-BE49-F238E27FC236}">
-                <a16:creationId xmlns:a16="http://schemas.microsoft.com/office/drawing/2014/main" id="{64CEE263-E4E1-4817-BA1A-A5FACE707D38}"/>
-              </a:ext>
-            </a:extLst>
-          </p:cNvPr>
-          <p:cNvSpPr txBox="1"/>
-          <p:nvPr/>
-        </p:nvSpPr>
-        <p:spPr>
-          <a:xfrm>
-            <a:off x="3476231" y="370415"/>
-            <a:ext cx="778184" cy="1323439"/>
-          </a:xfrm>
-          <a:prstGeom prst="rect">
-            <a:avLst/>
-          </a:prstGeom>
-          <a:noFill/>
-        </p:spPr>
-        <p:txBody>
-          <a:bodyPr wrap="square" rtlCol="0">
-            <a:spAutoFit/>
-          </a:bodyPr>
-          <a:lstStyle/>
-          <a:p>
-            <a:r>
-              <a:rPr lang="en-GB" sz="1600" dirty="0"/>
-              <a:t>0.6 </a:t>
-            </a:r>
-          </a:p>
-          <a:p>
-            <a:r>
-              <a:rPr lang="en-GB" sz="1600" dirty="0"/>
-              <a:t>    0.7</a:t>
-            </a:r>
-          </a:p>
-          <a:p>
-            <a:r>
-              <a:rPr lang="en-GB" sz="1600" dirty="0"/>
-              <a:t>      </a:t>
-            </a:r>
-          </a:p>
-          <a:p>
-            <a:r>
-              <a:rPr lang="en-GB" sz="1600" dirty="0"/>
-              <a:t>   0.74</a:t>
-            </a:r>
-          </a:p>
-          <a:p>
-            <a:r>
-              <a:rPr lang="en-GB" sz="1600" dirty="0"/>
-              <a:t>0.6</a:t>
-            </a:r>
-          </a:p>
-        </p:txBody>
-      </p:sp>
-      <p:sp>
-        <p:nvSpPr>
-          <p:cNvPr id="45" name="TextBox 44">
-            <a:extLst>
-              <a:ext uri="{FF2B5EF4-FFF2-40B4-BE49-F238E27FC236}">
-                <a16:creationId xmlns:a16="http://schemas.microsoft.com/office/drawing/2014/main" id="{68C9DFB2-0FA1-4941-B353-A01BFCAB9CDB}"/>
-              </a:ext>
-            </a:extLst>
-          </p:cNvPr>
-          <p:cNvSpPr txBox="1"/>
-          <p:nvPr/>
-        </p:nvSpPr>
-        <p:spPr>
-          <a:xfrm>
-            <a:off x="3362876" y="2366935"/>
-            <a:ext cx="869409" cy="1323439"/>
-          </a:xfrm>
-          <a:prstGeom prst="rect">
-            <a:avLst/>
-          </a:prstGeom>
-          <a:noFill/>
-        </p:spPr>
-        <p:txBody>
-          <a:bodyPr wrap="square" rtlCol="0">
-            <a:spAutoFit/>
-          </a:bodyPr>
-          <a:lstStyle/>
-          <a:p>
-            <a:r>
-              <a:rPr lang="en-GB" sz="1600" dirty="0"/>
-              <a:t>0.86 </a:t>
-            </a:r>
-          </a:p>
-          <a:p>
-            <a:r>
-              <a:rPr lang="en-GB" sz="1600" dirty="0"/>
-              <a:t>      0.81</a:t>
-            </a:r>
-          </a:p>
-          <a:p>
-            <a:r>
-              <a:rPr lang="en-GB" sz="1600" dirty="0"/>
-              <a:t>      </a:t>
-            </a:r>
-          </a:p>
-          <a:p>
-            <a:r>
-              <a:rPr lang="en-GB" sz="1600" dirty="0"/>
-              <a:t>      0.61</a:t>
-            </a:r>
-          </a:p>
-          <a:p>
-            <a:r>
-              <a:rPr lang="en-GB" sz="1600" dirty="0"/>
-              <a:t>  0.8</a:t>
-            </a:r>
-          </a:p>
-        </p:txBody>
-      </p:sp>
-      <p:sp>
-        <p:nvSpPr>
-          <p:cNvPr id="46" name="TextBox 45">
-            <a:extLst>
-              <a:ext uri="{FF2B5EF4-FFF2-40B4-BE49-F238E27FC236}">
-                <a16:creationId xmlns:a16="http://schemas.microsoft.com/office/drawing/2014/main" id="{4316348A-054D-4E6E-BAE9-903FC76EEA9B}"/>
-              </a:ext>
-            </a:extLst>
-          </p:cNvPr>
-          <p:cNvSpPr txBox="1"/>
-          <p:nvPr/>
-        </p:nvSpPr>
-        <p:spPr>
-          <a:xfrm>
-            <a:off x="3362876" y="4416119"/>
-            <a:ext cx="891539" cy="1323439"/>
-          </a:xfrm>
-          <a:prstGeom prst="rect">
-            <a:avLst/>
-          </a:prstGeom>
-          <a:noFill/>
-        </p:spPr>
-        <p:txBody>
-          <a:bodyPr wrap="square" rtlCol="0">
-            <a:spAutoFit/>
-          </a:bodyPr>
-          <a:lstStyle/>
-          <a:p>
-            <a:r>
-              <a:rPr lang="en-GB" sz="1600" dirty="0"/>
-              <a:t>0.62 </a:t>
-            </a:r>
-          </a:p>
-          <a:p>
-            <a:r>
-              <a:rPr lang="en-GB" sz="1600" dirty="0"/>
-              <a:t>      0.77</a:t>
-            </a:r>
-          </a:p>
-          <a:p>
-            <a:r>
-              <a:rPr lang="en-GB" sz="1600" dirty="0"/>
-              <a:t>      </a:t>
-            </a:r>
-          </a:p>
-          <a:p>
-            <a:r>
-              <a:rPr lang="en-GB" sz="1600" dirty="0"/>
-              <a:t>      0.62</a:t>
-            </a:r>
-          </a:p>
-          <a:p>
-            <a:r>
-              <a:rPr lang="en-GB" sz="1600" dirty="0"/>
-              <a:t>0.63</a:t>
-            </a:r>
-          </a:p>
-        </p:txBody>
-      </p:sp>
-      <p:sp>
-        <p:nvSpPr>
           <p:cNvPr id="47" name="TextBox 46">
             <a:extLst>
               <a:ext uri="{FF2B5EF4-FFF2-40B4-BE49-F238E27FC236}">
@@ -10226,7 +10054,16 @@
           <a:p>
             <a:r>
               <a:rPr lang="en-GB" sz="1600" dirty="0"/>
-              <a:t>0.76</a:t>
+              <a:t>0.68</a:t>
+            </a:r>
+          </a:p>
+          <a:p>
+            <a:endParaRPr lang="en-GB" sz="1600" dirty="0"/>
+          </a:p>
+          <a:p>
+            <a:r>
+              <a:rPr lang="en-GB" sz="1600" dirty="0"/>
+              <a:t>0.60</a:t>
             </a:r>
           </a:p>
           <a:p>
@@ -10244,16 +10081,7 @@
           <a:p>
             <a:r>
               <a:rPr lang="en-GB" sz="1600" dirty="0"/>
-              <a:t>1.19</a:t>
-            </a:r>
-          </a:p>
-          <a:p>
-            <a:endParaRPr lang="en-GB" sz="1600" dirty="0"/>
-          </a:p>
-          <a:p>
-            <a:r>
-              <a:rPr lang="en-GB" sz="1600" dirty="0"/>
-              <a:t>1.15</a:t>
+              <a:t>0.76</a:t>
             </a:r>
           </a:p>
         </p:txBody>
@@ -10288,7 +10116,7 @@
           <a:p>
             <a:r>
               <a:rPr lang="en-GB" sz="1600" dirty="0"/>
-              <a:t>1.26</a:t>
+              <a:t>0.63</a:t>
             </a:r>
           </a:p>
           <a:p>
@@ -10297,7 +10125,7 @@
           <a:p>
             <a:r>
               <a:rPr lang="en-GB" sz="1600" dirty="0"/>
-              <a:t>0.69</a:t>
+              <a:t>0.51</a:t>
             </a:r>
           </a:p>
           <a:p>
@@ -10306,7 +10134,7 @@
           <a:p>
             <a:r>
               <a:rPr lang="en-GB" sz="1600" dirty="0"/>
-              <a:t>1.25</a:t>
+              <a:t>0.77</a:t>
             </a:r>
           </a:p>
           <a:p>
@@ -10315,7 +10143,7 @@
           <a:p>
             <a:r>
               <a:rPr lang="en-GB" sz="1600" dirty="0"/>
-              <a:t>0.74</a:t>
+              <a:t>0.53</a:t>
             </a:r>
           </a:p>
         </p:txBody>
@@ -10350,7 +10178,7 @@
           <a:p>
             <a:r>
               <a:rPr lang="en-GB" sz="1600" dirty="0"/>
-              <a:t>0.84</a:t>
+              <a:t>0.69</a:t>
             </a:r>
           </a:p>
           <a:p>
@@ -10359,7 +10187,7 @@
           <a:p>
             <a:r>
               <a:rPr lang="en-GB" sz="1600" dirty="0"/>
-              <a:t>0.89</a:t>
+              <a:t>0.60</a:t>
             </a:r>
           </a:p>
           <a:p>
@@ -10368,7 +10196,7 @@
           <a:p>
             <a:r>
               <a:rPr lang="en-GB" sz="1600" dirty="0"/>
-              <a:t>0.77</a:t>
+              <a:t>0.67</a:t>
             </a:r>
           </a:p>
           <a:p>
@@ -10377,7 +10205,184 @@
           <a:p>
             <a:r>
               <a:rPr lang="en-GB" sz="1600" dirty="0"/>
-              <a:t>0.80</a:t>
+              <a:t>0.67</a:t>
+            </a:r>
+          </a:p>
+        </p:txBody>
+      </p:sp>
+      <p:sp>
+        <p:nvSpPr>
+          <p:cNvPr id="3" name="TextBox 2">
+            <a:extLst>
+              <a:ext uri="{FF2B5EF4-FFF2-40B4-BE49-F238E27FC236}">
+                <a16:creationId xmlns:a16="http://schemas.microsoft.com/office/drawing/2014/main" id="{2384192E-4737-3558-B4AB-8B20CBC45291}"/>
+              </a:ext>
+            </a:extLst>
+          </p:cNvPr>
+          <p:cNvSpPr txBox="1"/>
+          <p:nvPr/>
+        </p:nvSpPr>
+        <p:spPr>
+          <a:xfrm>
+            <a:off x="3476231" y="370415"/>
+            <a:ext cx="778184" cy="1323439"/>
+          </a:xfrm>
+          <a:prstGeom prst="rect">
+            <a:avLst/>
+          </a:prstGeom>
+          <a:noFill/>
+        </p:spPr>
+        <p:txBody>
+          <a:bodyPr wrap="square" rtlCol="0">
+            <a:spAutoFit/>
+          </a:bodyPr>
+          <a:lstStyle/>
+          <a:p>
+            <a:r>
+              <a:rPr lang="en-GB" sz="1600" dirty="0"/>
+              <a:t>0.57 </a:t>
+            </a:r>
+          </a:p>
+          <a:p>
+            <a:r>
+              <a:rPr lang="en-GB" sz="1600" dirty="0"/>
+              <a:t>    0.64</a:t>
+            </a:r>
+          </a:p>
+          <a:p>
+            <a:r>
+              <a:rPr lang="en-GB" sz="1600" dirty="0"/>
+              <a:t>      </a:t>
+            </a:r>
+          </a:p>
+          <a:p>
+            <a:r>
+              <a:rPr lang="en-GB" sz="1600" dirty="0"/>
+              <a:t>   0.51</a:t>
+            </a:r>
+          </a:p>
+          <a:p>
+            <a:r>
+              <a:rPr lang="en-GB" sz="1600" dirty="0"/>
+              <a:t>0.49</a:t>
+            </a:r>
+          </a:p>
+        </p:txBody>
+      </p:sp>
+      <p:sp>
+        <p:nvSpPr>
+          <p:cNvPr id="4" name="TextBox 3">
+            <a:extLst>
+              <a:ext uri="{FF2B5EF4-FFF2-40B4-BE49-F238E27FC236}">
+                <a16:creationId xmlns:a16="http://schemas.microsoft.com/office/drawing/2014/main" id="{EAA7A7FB-D6FD-E827-03CD-94A42694C5D6}"/>
+              </a:ext>
+            </a:extLst>
+          </p:cNvPr>
+          <p:cNvSpPr txBox="1"/>
+          <p:nvPr/>
+        </p:nvSpPr>
+        <p:spPr>
+          <a:xfrm>
+            <a:off x="3362876" y="2366935"/>
+            <a:ext cx="869409" cy="1323439"/>
+          </a:xfrm>
+          <a:prstGeom prst="rect">
+            <a:avLst/>
+          </a:prstGeom>
+          <a:noFill/>
+        </p:spPr>
+        <p:txBody>
+          <a:bodyPr wrap="square" rtlCol="0">
+            <a:spAutoFit/>
+          </a:bodyPr>
+          <a:lstStyle/>
+          <a:p>
+            <a:r>
+              <a:rPr lang="en-GB" sz="1600" dirty="0"/>
+              <a:t>0.61 </a:t>
+            </a:r>
+          </a:p>
+          <a:p>
+            <a:r>
+              <a:rPr lang="en-GB" sz="1600" dirty="0"/>
+              <a:t>      0.70</a:t>
+            </a:r>
+          </a:p>
+          <a:p>
+            <a:r>
+              <a:rPr lang="en-GB" sz="1600" dirty="0"/>
+              <a:t>      </a:t>
+            </a:r>
+          </a:p>
+          <a:p>
+            <a:r>
+              <a:rPr lang="en-GB" sz="1600" dirty="0"/>
+              <a:t>      0.48</a:t>
+            </a:r>
+          </a:p>
+          <a:p>
+            <a:r>
+              <a:rPr lang="en-GB" sz="1600" dirty="0"/>
+              <a:t>  0.69</a:t>
+            </a:r>
+          </a:p>
+        </p:txBody>
+      </p:sp>
+      <p:sp>
+        <p:nvSpPr>
+          <p:cNvPr id="5" name="TextBox 4">
+            <a:extLst>
+              <a:ext uri="{FF2B5EF4-FFF2-40B4-BE49-F238E27FC236}">
+                <a16:creationId xmlns:a16="http://schemas.microsoft.com/office/drawing/2014/main" id="{925FD989-EB83-201D-396A-6D9B99648573}"/>
+              </a:ext>
+            </a:extLst>
+          </p:cNvPr>
+          <p:cNvSpPr txBox="1"/>
+          <p:nvPr/>
+        </p:nvSpPr>
+        <p:spPr>
+          <a:xfrm>
+            <a:off x="3362876" y="4416119"/>
+            <a:ext cx="891539" cy="1323439"/>
+          </a:xfrm>
+          <a:prstGeom prst="rect">
+            <a:avLst/>
+          </a:prstGeom>
+          <a:noFill/>
+        </p:spPr>
+        <p:txBody>
+          <a:bodyPr wrap="square" rtlCol="0">
+            <a:spAutoFit/>
+          </a:bodyPr>
+          <a:lstStyle/>
+          <a:p>
+            <a:r>
+              <a:rPr lang="en-GB" sz="1600" dirty="0"/>
+              <a:t>0.56 </a:t>
+            </a:r>
+          </a:p>
+          <a:p>
+            <a:r>
+              <a:rPr lang="en-GB" sz="1600" dirty="0"/>
+              <a:t>      0.63</a:t>
+            </a:r>
+          </a:p>
+          <a:p>
+            <a:r>
+              <a:rPr lang="en-GB" sz="1600" dirty="0"/>
+              <a:t>      </a:t>
+            </a:r>
+          </a:p>
+          <a:p>
+            <a:r>
+              <a:rPr lang="en-GB" sz="1600" dirty="0"/>
+              <a:t>      0.58</a:t>
+            </a:r>
+          </a:p>
+          <a:p>
+            <a:r>
+              <a:rPr lang="en-GB" sz="1600" dirty="0"/>
+              <a:t>0.58</a:t>
             </a:r>
           </a:p>
         </p:txBody>
@@ -12526,183 +12531,6 @@
       </p:cxnSp>
       <p:sp>
         <p:nvSpPr>
-          <p:cNvPr id="2" name="TextBox 1">
-            <a:extLst>
-              <a:ext uri="{FF2B5EF4-FFF2-40B4-BE49-F238E27FC236}">
-                <a16:creationId xmlns:a16="http://schemas.microsoft.com/office/drawing/2014/main" id="{64CEE263-E4E1-4817-BA1A-A5FACE707D38}"/>
-              </a:ext>
-            </a:extLst>
-          </p:cNvPr>
-          <p:cNvSpPr txBox="1"/>
-          <p:nvPr/>
-        </p:nvSpPr>
-        <p:spPr>
-          <a:xfrm>
-            <a:off x="2614733" y="370415"/>
-            <a:ext cx="778184" cy="1323439"/>
-          </a:xfrm>
-          <a:prstGeom prst="rect">
-            <a:avLst/>
-          </a:prstGeom>
-          <a:noFill/>
-        </p:spPr>
-        <p:txBody>
-          <a:bodyPr wrap="square" rtlCol="0">
-            <a:spAutoFit/>
-          </a:bodyPr>
-          <a:lstStyle/>
-          <a:p>
-            <a:r>
-              <a:rPr lang="en-GB" sz="1600" dirty="0"/>
-              <a:t>0.6 </a:t>
-            </a:r>
-          </a:p>
-          <a:p>
-            <a:r>
-              <a:rPr lang="en-GB" sz="1600" dirty="0"/>
-              <a:t>    0.7</a:t>
-            </a:r>
-          </a:p>
-          <a:p>
-            <a:r>
-              <a:rPr lang="en-GB" sz="1600" dirty="0"/>
-              <a:t>      </a:t>
-            </a:r>
-          </a:p>
-          <a:p>
-            <a:r>
-              <a:rPr lang="en-GB" sz="1600" dirty="0"/>
-              <a:t>   0.74</a:t>
-            </a:r>
-          </a:p>
-          <a:p>
-            <a:r>
-              <a:rPr lang="en-GB" sz="1600" dirty="0"/>
-              <a:t>0.6</a:t>
-            </a:r>
-          </a:p>
-        </p:txBody>
-      </p:sp>
-      <p:sp>
-        <p:nvSpPr>
-          <p:cNvPr id="45" name="TextBox 44">
-            <a:extLst>
-              <a:ext uri="{FF2B5EF4-FFF2-40B4-BE49-F238E27FC236}">
-                <a16:creationId xmlns:a16="http://schemas.microsoft.com/office/drawing/2014/main" id="{68C9DFB2-0FA1-4941-B353-A01BFCAB9CDB}"/>
-              </a:ext>
-            </a:extLst>
-          </p:cNvPr>
-          <p:cNvSpPr txBox="1"/>
-          <p:nvPr/>
-        </p:nvSpPr>
-        <p:spPr>
-          <a:xfrm>
-            <a:off x="2501378" y="2366935"/>
-            <a:ext cx="869409" cy="1323439"/>
-          </a:xfrm>
-          <a:prstGeom prst="rect">
-            <a:avLst/>
-          </a:prstGeom>
-          <a:noFill/>
-        </p:spPr>
-        <p:txBody>
-          <a:bodyPr wrap="square" rtlCol="0">
-            <a:spAutoFit/>
-          </a:bodyPr>
-          <a:lstStyle/>
-          <a:p>
-            <a:r>
-              <a:rPr lang="en-GB" sz="1600" dirty="0"/>
-              <a:t>0.86 </a:t>
-            </a:r>
-          </a:p>
-          <a:p>
-            <a:r>
-              <a:rPr lang="en-GB" sz="1600" dirty="0"/>
-              <a:t>      0.81</a:t>
-            </a:r>
-          </a:p>
-          <a:p>
-            <a:r>
-              <a:rPr lang="en-GB" sz="1600" dirty="0"/>
-              <a:t>      </a:t>
-            </a:r>
-          </a:p>
-          <a:p>
-            <a:r>
-              <a:rPr lang="en-GB" sz="1600" dirty="0"/>
-              <a:t>      0.61</a:t>
-            </a:r>
-          </a:p>
-          <a:p>
-            <a:r>
-              <a:rPr lang="en-GB" sz="1600" dirty="0"/>
-              <a:t>  0.8</a:t>
-            </a:r>
-          </a:p>
-        </p:txBody>
-      </p:sp>
-      <p:sp>
-        <p:nvSpPr>
-          <p:cNvPr id="46" name="TextBox 45">
-            <a:extLst>
-              <a:ext uri="{FF2B5EF4-FFF2-40B4-BE49-F238E27FC236}">
-                <a16:creationId xmlns:a16="http://schemas.microsoft.com/office/drawing/2014/main" id="{4316348A-054D-4E6E-BAE9-903FC76EEA9B}"/>
-              </a:ext>
-            </a:extLst>
-          </p:cNvPr>
-          <p:cNvSpPr txBox="1"/>
-          <p:nvPr/>
-        </p:nvSpPr>
-        <p:spPr>
-          <a:xfrm>
-            <a:off x="2501378" y="4416119"/>
-            <a:ext cx="891539" cy="1323439"/>
-          </a:xfrm>
-          <a:prstGeom prst="rect">
-            <a:avLst/>
-          </a:prstGeom>
-          <a:noFill/>
-        </p:spPr>
-        <p:txBody>
-          <a:bodyPr wrap="square" rtlCol="0">
-            <a:spAutoFit/>
-          </a:bodyPr>
-          <a:lstStyle/>
-          <a:p>
-            <a:r>
-              <a:rPr lang="en-GB" sz="1600" dirty="0"/>
-              <a:t>0.62 </a:t>
-            </a:r>
-          </a:p>
-          <a:p>
-            <a:r>
-              <a:rPr lang="en-GB" sz="1600" dirty="0"/>
-              <a:t>      0.77</a:t>
-            </a:r>
-          </a:p>
-          <a:p>
-            <a:r>
-              <a:rPr lang="en-GB" sz="1600" dirty="0"/>
-              <a:t>      </a:t>
-            </a:r>
-          </a:p>
-          <a:p>
-            <a:r>
-              <a:rPr lang="en-GB" sz="1600" dirty="0"/>
-              <a:t>      0.62</a:t>
-            </a:r>
-          </a:p>
-          <a:p>
-            <a:r>
-              <a:rPr lang="en-GB" sz="1600" dirty="0"/>
-              <a:t>0.63</a:t>
-            </a:r>
-          </a:p>
-        </p:txBody>
-      </p:sp>
-      <p:sp>
-        <p:nvSpPr>
           <p:cNvPr id="47" name="TextBox 46">
             <a:extLst>
               <a:ext uri="{FF2B5EF4-FFF2-40B4-BE49-F238E27FC236}">
@@ -13075,192 +12903,6 @@
       </p:sp>
       <p:sp>
         <p:nvSpPr>
-          <p:cNvPr id="98" name="TextBox 97">
-            <a:extLst>
-              <a:ext uri="{FF2B5EF4-FFF2-40B4-BE49-F238E27FC236}">
-                <a16:creationId xmlns:a16="http://schemas.microsoft.com/office/drawing/2014/main" id="{DEBEE01B-8CA3-4D12-ABAD-4EA2D2BC16C8}"/>
-              </a:ext>
-            </a:extLst>
-          </p:cNvPr>
-          <p:cNvSpPr txBox="1"/>
-          <p:nvPr/>
-        </p:nvSpPr>
-        <p:spPr>
-          <a:xfrm>
-            <a:off x="4117001" y="107229"/>
-            <a:ext cx="778184" cy="1815882"/>
-          </a:xfrm>
-          <a:prstGeom prst="rect">
-            <a:avLst/>
-          </a:prstGeom>
-          <a:noFill/>
-        </p:spPr>
-        <p:txBody>
-          <a:bodyPr wrap="square" rtlCol="0">
-            <a:spAutoFit/>
-          </a:bodyPr>
-          <a:lstStyle/>
-          <a:p>
-            <a:r>
-              <a:rPr lang="en-GB" sz="1600" dirty="0"/>
-              <a:t>0.76</a:t>
-            </a:r>
-          </a:p>
-          <a:p>
-            <a:endParaRPr lang="en-GB" sz="1600" dirty="0"/>
-          </a:p>
-          <a:p>
-            <a:r>
-              <a:rPr lang="en-GB" sz="1600" dirty="0"/>
-              <a:t>0.74</a:t>
-            </a:r>
-          </a:p>
-          <a:p>
-            <a:endParaRPr lang="en-GB" sz="1600" dirty="0"/>
-          </a:p>
-          <a:p>
-            <a:r>
-              <a:rPr lang="en-GB" sz="1600" dirty="0"/>
-              <a:t>1.19</a:t>
-            </a:r>
-          </a:p>
-          <a:p>
-            <a:endParaRPr lang="en-GB" sz="1600" dirty="0"/>
-          </a:p>
-          <a:p>
-            <a:r>
-              <a:rPr lang="en-GB" sz="1600" dirty="0"/>
-              <a:t>1.15</a:t>
-            </a:r>
-          </a:p>
-        </p:txBody>
-      </p:sp>
-      <p:sp>
-        <p:nvSpPr>
-          <p:cNvPr id="99" name="TextBox 98">
-            <a:extLst>
-              <a:ext uri="{FF2B5EF4-FFF2-40B4-BE49-F238E27FC236}">
-                <a16:creationId xmlns:a16="http://schemas.microsoft.com/office/drawing/2014/main" id="{98EE6797-20B6-436D-9339-42351F566864}"/>
-              </a:ext>
-            </a:extLst>
-          </p:cNvPr>
-          <p:cNvSpPr txBox="1"/>
-          <p:nvPr/>
-        </p:nvSpPr>
-        <p:spPr>
-          <a:xfrm>
-            <a:off x="4096019" y="2108141"/>
-            <a:ext cx="778184" cy="1815882"/>
-          </a:xfrm>
-          <a:prstGeom prst="rect">
-            <a:avLst/>
-          </a:prstGeom>
-          <a:noFill/>
-        </p:spPr>
-        <p:txBody>
-          <a:bodyPr wrap="square" rtlCol="0">
-            <a:spAutoFit/>
-          </a:bodyPr>
-          <a:lstStyle/>
-          <a:p>
-            <a:r>
-              <a:rPr lang="en-GB" sz="1600" dirty="0"/>
-              <a:t>1.26</a:t>
-            </a:r>
-          </a:p>
-          <a:p>
-            <a:endParaRPr lang="en-GB" sz="1600" dirty="0"/>
-          </a:p>
-          <a:p>
-            <a:r>
-              <a:rPr lang="en-GB" sz="1600" dirty="0"/>
-              <a:t>0.69</a:t>
-            </a:r>
-          </a:p>
-          <a:p>
-            <a:endParaRPr lang="en-GB" sz="1600" dirty="0"/>
-          </a:p>
-          <a:p>
-            <a:r>
-              <a:rPr lang="en-GB" sz="1600" dirty="0"/>
-              <a:t>1.25</a:t>
-            </a:r>
-          </a:p>
-          <a:p>
-            <a:endParaRPr lang="en-GB" sz="1600" dirty="0"/>
-          </a:p>
-          <a:p>
-            <a:r>
-              <a:rPr lang="en-GB" sz="1600" dirty="0"/>
-              <a:t>0.74</a:t>
-            </a:r>
-          </a:p>
-        </p:txBody>
-      </p:sp>
-      <p:sp>
-        <p:nvSpPr>
-          <p:cNvPr id="100" name="TextBox 99">
-            <a:extLst>
-              <a:ext uri="{FF2B5EF4-FFF2-40B4-BE49-F238E27FC236}">
-                <a16:creationId xmlns:a16="http://schemas.microsoft.com/office/drawing/2014/main" id="{6892CD87-59D2-48F6-8CEA-420B2716ABD9}"/>
-              </a:ext>
-            </a:extLst>
-          </p:cNvPr>
-          <p:cNvSpPr txBox="1"/>
-          <p:nvPr/>
-        </p:nvSpPr>
-        <p:spPr>
-          <a:xfrm>
-            <a:off x="4113523" y="4168236"/>
-            <a:ext cx="778184" cy="1815882"/>
-          </a:xfrm>
-          <a:prstGeom prst="rect">
-            <a:avLst/>
-          </a:prstGeom>
-          <a:noFill/>
-        </p:spPr>
-        <p:txBody>
-          <a:bodyPr wrap="square" rtlCol="0">
-            <a:spAutoFit/>
-          </a:bodyPr>
-          <a:lstStyle/>
-          <a:p>
-            <a:r>
-              <a:rPr lang="en-GB" sz="1600" dirty="0"/>
-              <a:t>0.84</a:t>
-            </a:r>
-          </a:p>
-          <a:p>
-            <a:endParaRPr lang="en-GB" sz="1600" dirty="0"/>
-          </a:p>
-          <a:p>
-            <a:r>
-              <a:rPr lang="en-GB" sz="1600" dirty="0"/>
-              <a:t>0.89</a:t>
-            </a:r>
-          </a:p>
-          <a:p>
-            <a:endParaRPr lang="en-GB" sz="1600" dirty="0"/>
-          </a:p>
-          <a:p>
-            <a:r>
-              <a:rPr lang="en-GB" sz="1600" dirty="0"/>
-              <a:t>0.77</a:t>
-            </a:r>
-          </a:p>
-          <a:p>
-            <a:endParaRPr lang="en-GB" sz="1600" dirty="0"/>
-          </a:p>
-          <a:p>
-            <a:r>
-              <a:rPr lang="en-GB" sz="1600" dirty="0"/>
-              <a:t>0.80</a:t>
-            </a:r>
-          </a:p>
-        </p:txBody>
-      </p:sp>
-      <p:sp>
-        <p:nvSpPr>
           <p:cNvPr id="101" name="Arc 100">
             <a:extLst>
               <a:ext uri="{FF2B5EF4-FFF2-40B4-BE49-F238E27FC236}">
@@ -13310,6 +12952,369 @@
           <a:p>
             <a:pPr algn="ctr"/>
             <a:endParaRPr lang="en-GB"/>
+          </a:p>
+        </p:txBody>
+      </p:sp>
+      <p:sp>
+        <p:nvSpPr>
+          <p:cNvPr id="3" name="TextBox 2">
+            <a:extLst>
+              <a:ext uri="{FF2B5EF4-FFF2-40B4-BE49-F238E27FC236}">
+                <a16:creationId xmlns:a16="http://schemas.microsoft.com/office/drawing/2014/main" id="{3428F433-AFA5-47C7-1895-28E0A7113BD8}"/>
+              </a:ext>
+            </a:extLst>
+          </p:cNvPr>
+          <p:cNvSpPr txBox="1"/>
+          <p:nvPr/>
+        </p:nvSpPr>
+        <p:spPr>
+          <a:xfrm>
+            <a:off x="4094839" y="107229"/>
+            <a:ext cx="778184" cy="1815882"/>
+          </a:xfrm>
+          <a:prstGeom prst="rect">
+            <a:avLst/>
+          </a:prstGeom>
+          <a:noFill/>
+        </p:spPr>
+        <p:txBody>
+          <a:bodyPr wrap="square" rtlCol="0">
+            <a:spAutoFit/>
+          </a:bodyPr>
+          <a:lstStyle/>
+          <a:p>
+            <a:r>
+              <a:rPr lang="en-GB" sz="1600" dirty="0"/>
+              <a:t>0.68</a:t>
+            </a:r>
+          </a:p>
+          <a:p>
+            <a:endParaRPr lang="en-GB" sz="1600" dirty="0"/>
+          </a:p>
+          <a:p>
+            <a:r>
+              <a:rPr lang="en-GB" sz="1600" dirty="0"/>
+              <a:t>0.60</a:t>
+            </a:r>
+          </a:p>
+          <a:p>
+            <a:endParaRPr lang="en-GB" sz="1600" dirty="0"/>
+          </a:p>
+          <a:p>
+            <a:r>
+              <a:rPr lang="en-GB" sz="1600" dirty="0"/>
+              <a:t>0.74</a:t>
+            </a:r>
+          </a:p>
+          <a:p>
+            <a:endParaRPr lang="en-GB" sz="1600" dirty="0"/>
+          </a:p>
+          <a:p>
+            <a:r>
+              <a:rPr lang="en-GB" sz="1600" dirty="0"/>
+              <a:t>0.76</a:t>
+            </a:r>
+          </a:p>
+        </p:txBody>
+      </p:sp>
+      <p:sp>
+        <p:nvSpPr>
+          <p:cNvPr id="4" name="TextBox 3">
+            <a:extLst>
+              <a:ext uri="{FF2B5EF4-FFF2-40B4-BE49-F238E27FC236}">
+                <a16:creationId xmlns:a16="http://schemas.microsoft.com/office/drawing/2014/main" id="{79669A22-DD34-221E-E979-348AD71839DB}"/>
+              </a:ext>
+            </a:extLst>
+          </p:cNvPr>
+          <p:cNvSpPr txBox="1"/>
+          <p:nvPr/>
+        </p:nvSpPr>
+        <p:spPr>
+          <a:xfrm>
+            <a:off x="4073857" y="2108141"/>
+            <a:ext cx="778184" cy="1815882"/>
+          </a:xfrm>
+          <a:prstGeom prst="rect">
+            <a:avLst/>
+          </a:prstGeom>
+          <a:noFill/>
+        </p:spPr>
+        <p:txBody>
+          <a:bodyPr wrap="square" rtlCol="0">
+            <a:spAutoFit/>
+          </a:bodyPr>
+          <a:lstStyle/>
+          <a:p>
+            <a:r>
+              <a:rPr lang="en-GB" sz="1600" dirty="0"/>
+              <a:t>0.63</a:t>
+            </a:r>
+          </a:p>
+          <a:p>
+            <a:endParaRPr lang="en-GB" sz="1600" dirty="0"/>
+          </a:p>
+          <a:p>
+            <a:r>
+              <a:rPr lang="en-GB" sz="1600" dirty="0"/>
+              <a:t>0.51</a:t>
+            </a:r>
+          </a:p>
+          <a:p>
+            <a:endParaRPr lang="en-GB" sz="1600" dirty="0"/>
+          </a:p>
+          <a:p>
+            <a:r>
+              <a:rPr lang="en-GB" sz="1600" dirty="0"/>
+              <a:t>0.77</a:t>
+            </a:r>
+          </a:p>
+          <a:p>
+            <a:endParaRPr lang="en-GB" sz="1600" dirty="0"/>
+          </a:p>
+          <a:p>
+            <a:r>
+              <a:rPr lang="en-GB" sz="1600" dirty="0"/>
+              <a:t>0.53</a:t>
+            </a:r>
+          </a:p>
+        </p:txBody>
+      </p:sp>
+      <p:sp>
+        <p:nvSpPr>
+          <p:cNvPr id="5" name="TextBox 4">
+            <a:extLst>
+              <a:ext uri="{FF2B5EF4-FFF2-40B4-BE49-F238E27FC236}">
+                <a16:creationId xmlns:a16="http://schemas.microsoft.com/office/drawing/2014/main" id="{A96DD7FB-6EF6-1813-8269-968B7D99EEC8}"/>
+              </a:ext>
+            </a:extLst>
+          </p:cNvPr>
+          <p:cNvSpPr txBox="1"/>
+          <p:nvPr/>
+        </p:nvSpPr>
+        <p:spPr>
+          <a:xfrm>
+            <a:off x="4091361" y="4168236"/>
+            <a:ext cx="778184" cy="1815882"/>
+          </a:xfrm>
+          <a:prstGeom prst="rect">
+            <a:avLst/>
+          </a:prstGeom>
+          <a:noFill/>
+        </p:spPr>
+        <p:txBody>
+          <a:bodyPr wrap="square" rtlCol="0">
+            <a:spAutoFit/>
+          </a:bodyPr>
+          <a:lstStyle/>
+          <a:p>
+            <a:r>
+              <a:rPr lang="en-GB" sz="1600" dirty="0"/>
+              <a:t>0.69</a:t>
+            </a:r>
+          </a:p>
+          <a:p>
+            <a:endParaRPr lang="en-GB" sz="1600" dirty="0"/>
+          </a:p>
+          <a:p>
+            <a:r>
+              <a:rPr lang="en-GB" sz="1600" dirty="0"/>
+              <a:t>0.60</a:t>
+            </a:r>
+          </a:p>
+          <a:p>
+            <a:endParaRPr lang="en-GB" sz="1600" dirty="0"/>
+          </a:p>
+          <a:p>
+            <a:r>
+              <a:rPr lang="en-GB" sz="1600" dirty="0"/>
+              <a:t>0.67</a:t>
+            </a:r>
+          </a:p>
+          <a:p>
+            <a:endParaRPr lang="en-GB" sz="1600" dirty="0"/>
+          </a:p>
+          <a:p>
+            <a:r>
+              <a:rPr lang="en-GB" sz="1600" dirty="0"/>
+              <a:t>0.67</a:t>
+            </a:r>
+          </a:p>
+        </p:txBody>
+      </p:sp>
+      <p:sp>
+        <p:nvSpPr>
+          <p:cNvPr id="6" name="TextBox 5">
+            <a:extLst>
+              <a:ext uri="{FF2B5EF4-FFF2-40B4-BE49-F238E27FC236}">
+                <a16:creationId xmlns:a16="http://schemas.microsoft.com/office/drawing/2014/main" id="{0ECAEA3A-F08E-8088-E1E0-6A9E22AA3CFA}"/>
+              </a:ext>
+            </a:extLst>
+          </p:cNvPr>
+          <p:cNvSpPr txBox="1"/>
+          <p:nvPr/>
+        </p:nvSpPr>
+        <p:spPr>
+          <a:xfrm>
+            <a:off x="2592571" y="370415"/>
+            <a:ext cx="778184" cy="1323439"/>
+          </a:xfrm>
+          <a:prstGeom prst="rect">
+            <a:avLst/>
+          </a:prstGeom>
+          <a:noFill/>
+        </p:spPr>
+        <p:txBody>
+          <a:bodyPr wrap="square" rtlCol="0">
+            <a:spAutoFit/>
+          </a:bodyPr>
+          <a:lstStyle/>
+          <a:p>
+            <a:r>
+              <a:rPr lang="en-GB" sz="1600" dirty="0"/>
+              <a:t>0.57 </a:t>
+            </a:r>
+          </a:p>
+          <a:p>
+            <a:r>
+              <a:rPr lang="en-GB" sz="1600" dirty="0"/>
+              <a:t>    0.64</a:t>
+            </a:r>
+          </a:p>
+          <a:p>
+            <a:r>
+              <a:rPr lang="en-GB" sz="1600" dirty="0"/>
+              <a:t>      </a:t>
+            </a:r>
+          </a:p>
+          <a:p>
+            <a:r>
+              <a:rPr lang="en-GB" sz="1600" dirty="0"/>
+              <a:t>   0.51</a:t>
+            </a:r>
+          </a:p>
+          <a:p>
+            <a:r>
+              <a:rPr lang="en-GB" sz="1600" dirty="0"/>
+              <a:t>0.49</a:t>
+            </a:r>
+          </a:p>
+        </p:txBody>
+      </p:sp>
+      <p:sp>
+        <p:nvSpPr>
+          <p:cNvPr id="7" name="TextBox 6">
+            <a:extLst>
+              <a:ext uri="{FF2B5EF4-FFF2-40B4-BE49-F238E27FC236}">
+                <a16:creationId xmlns:a16="http://schemas.microsoft.com/office/drawing/2014/main" id="{552DE088-1889-3196-7C14-A5F8509912CF}"/>
+              </a:ext>
+            </a:extLst>
+          </p:cNvPr>
+          <p:cNvSpPr txBox="1"/>
+          <p:nvPr/>
+        </p:nvSpPr>
+        <p:spPr>
+          <a:xfrm>
+            <a:off x="2479216" y="2366935"/>
+            <a:ext cx="869409" cy="1323439"/>
+          </a:xfrm>
+          <a:prstGeom prst="rect">
+            <a:avLst/>
+          </a:prstGeom>
+          <a:noFill/>
+        </p:spPr>
+        <p:txBody>
+          <a:bodyPr wrap="square" rtlCol="0">
+            <a:spAutoFit/>
+          </a:bodyPr>
+          <a:lstStyle/>
+          <a:p>
+            <a:r>
+              <a:rPr lang="en-GB" sz="1600" dirty="0"/>
+              <a:t>0.61 </a:t>
+            </a:r>
+          </a:p>
+          <a:p>
+            <a:r>
+              <a:rPr lang="en-GB" sz="1600" dirty="0"/>
+              <a:t>      0.70</a:t>
+            </a:r>
+          </a:p>
+          <a:p>
+            <a:r>
+              <a:rPr lang="en-GB" sz="1600" dirty="0"/>
+              <a:t>      </a:t>
+            </a:r>
+          </a:p>
+          <a:p>
+            <a:r>
+              <a:rPr lang="en-GB" sz="1600" dirty="0"/>
+              <a:t>      0.48</a:t>
+            </a:r>
+          </a:p>
+          <a:p>
+            <a:r>
+              <a:rPr lang="en-GB" sz="1600" dirty="0"/>
+              <a:t>  0.69</a:t>
+            </a:r>
+          </a:p>
+        </p:txBody>
+      </p:sp>
+      <p:sp>
+        <p:nvSpPr>
+          <p:cNvPr id="8" name="TextBox 7">
+            <a:extLst>
+              <a:ext uri="{FF2B5EF4-FFF2-40B4-BE49-F238E27FC236}">
+                <a16:creationId xmlns:a16="http://schemas.microsoft.com/office/drawing/2014/main" id="{00F4001E-748E-005F-E232-9024C65949CB}"/>
+              </a:ext>
+            </a:extLst>
+          </p:cNvPr>
+          <p:cNvSpPr txBox="1"/>
+          <p:nvPr/>
+        </p:nvSpPr>
+        <p:spPr>
+          <a:xfrm>
+            <a:off x="2479216" y="4416119"/>
+            <a:ext cx="891539" cy="1323439"/>
+          </a:xfrm>
+          <a:prstGeom prst="rect">
+            <a:avLst/>
+          </a:prstGeom>
+          <a:noFill/>
+        </p:spPr>
+        <p:txBody>
+          <a:bodyPr wrap="square" rtlCol="0">
+            <a:spAutoFit/>
+          </a:bodyPr>
+          <a:lstStyle/>
+          <a:p>
+            <a:r>
+              <a:rPr lang="en-GB" sz="1600" dirty="0"/>
+              <a:t>0.56 </a:t>
+            </a:r>
+          </a:p>
+          <a:p>
+            <a:r>
+              <a:rPr lang="en-GB" sz="1600" dirty="0"/>
+              <a:t>      0.63</a:t>
+            </a:r>
+          </a:p>
+          <a:p>
+            <a:r>
+              <a:rPr lang="en-GB" sz="1600" dirty="0"/>
+              <a:t>      </a:t>
+            </a:r>
+          </a:p>
+          <a:p>
+            <a:r>
+              <a:rPr lang="en-GB" sz="1600" dirty="0"/>
+              <a:t>      0.58</a:t>
+            </a:r>
+          </a:p>
+          <a:p>
+            <a:r>
+              <a:rPr lang="en-GB" sz="1600" dirty="0"/>
+              <a:t>0.58</a:t>
+            </a:r>
           </a:p>
         </p:txBody>
       </p:sp>
